--- a/workshop/Copilot-Studio-Workshop-Slides/Module-09-Multimodal-and-Data.pptx
+++ b/workshop/Copilot-Studio-Workshop-Slides/Module-09-Multimodal-and-Data.pptx
@@ -9,6 +9,7 @@
     <p:sldId id="257" r:id="rId3"/>
     <p:sldId id="258" r:id="rId4"/>
     <p:sldId id="259" r:id="rId5"/>
+    <p:sldId id="266" r:id="rId17"/>
     <p:sldId id="260" r:id="rId6"/>
     <p:sldId id="261" r:id="rId7"/>
     <p:sldId id="262" r:id="rId8"/>
@@ -641,6 +642,70 @@
 </p:notes>
 </file>
 
+<file path=ppt/notesSlides/notesSlide11.xml><?xml version="1.0" encoding="utf-8"?>
+<p:notes xmlns:a="http://schemas.openxmlformats.org/drawingml/2006/main" xmlns:r="http://schemas.openxmlformats.org/officeDocument/2006/relationships" xmlns:p="http://schemas.openxmlformats.org/presentationml/2006/main">
+  <p:cSld>
+    <p:spTree>
+      <p:nvGrpSpPr>
+        <p:cNvPr id="1" name=""/>
+        <p:cNvGrpSpPr/>
+        <p:nvPr/>
+      </p:nvGrpSpPr>
+      <p:grpSpPr>
+        <a:xfrm>
+          <a:off x="0" y="0"/>
+          <a:ext cx="0" cy="0"/>
+          <a:chOff x="0" y="0"/>
+          <a:chExt cx="0" cy="0"/>
+        </a:xfrm>
+      </p:grpSpPr>
+      <p:sp>
+        <p:nvSpPr>
+          <p:cNvPr id="2" name="Slide Image Placeholder 1"/>
+          <p:cNvSpPr>
+            <a:spLocks noGrp="1" noRot="1" noChangeAspect="1"/>
+          </p:cNvSpPr>
+          <p:nvPr>
+            <p:ph type="sldImg"/>
+          </p:nvPr>
+        </p:nvSpPr>
+        <p:spPr/>
+      </p:sp>
+      <p:sp>
+        <p:nvSpPr>
+          <p:cNvPr id="3" name="Notes Placeholder 2"/>
+          <p:cNvSpPr>
+            <a:spLocks noGrp="1"/>
+          </p:cNvSpPr>
+          <p:nvPr>
+            <p:ph type="body" idx="1"/>
+          </p:nvPr>
+        </p:nvSpPr>
+        <p:spPr/>
+        <p:txBody>
+          <a:bodyPr/>
+          <a:lstStyle/>
+          <a:p>
+            <a:r>
+              <a:rPr lang="en-US" dirty="0"/>
+              <a:t>This single checkpoint prevents the most common Lab 20 support escalation. Open the Power Apps maker portal, navigate to the Dataverse tables view, and show the five Hiring Hub tables with sample data on screen. Ask the room to confirm they see the same tables before continuing. If any participant has missing or empty tables, resolve the data-readiness issue now rather than debugging it during Lab 20 when it will be mistaken for a grounding or model problem.</a:t>
+            </a:r>
+          </a:p>
+        </p:txBody>
+      </p:sp>
+    </p:spTree>
+    <p:extLst>
+      <p:ext uri="{BB962C8B-B14F-4D97-AF65-F5344CB8AC3E}">
+        <p14:creationId xmlns:p14="http://schemas.microsoft.com/office/powerpoint/2010/main" val="1024086991"/>
+      </p:ext>
+    </p:extLst>
+  </p:cSld>
+  <p:clrMapOvr>
+    <a:masterClrMapping/>
+  </p:clrMapOvr>
+</p:notes>
+</file>
+
 <file path=ppt/notesSlides/notesSlide2.xml><?xml version="1.0" encoding="utf-8"?>
 <p:notes xmlns:a="http://schemas.openxmlformats.org/drawingml/2006/main" xmlns:r="http://schemas.openxmlformats.org/officeDocument/2006/relationships" xmlns:p="http://schemas.openxmlformats.org/presentationml/2006/main">
   <p:cSld>
@@ -2947,6 +3012,1182 @@
                 <a:cs typeface="Segoe UI" pitchFamily="34" charset="-120"/>
               </a:rPr>
               <a:t>Up next: Module 10 — MCP and Extensibility  (Lab 22: Governed tool connections via the MCP wizard)</a:t>
+            </a:r>
+            <a:endParaRPr lang="en-US" sz="1100" dirty="0"/>
+          </a:p>
+        </p:txBody>
+      </p:sp>
+    </p:spTree>
+  </p:cSld>
+  <p:clrMapOvr>
+    <a:masterClrMapping/>
+  </p:clrMapOvr>
+</p:sld>
+</file>
+
+<file path=ppt/slides/slide11.xml><?xml version="1.0" encoding="utf-8"?>
+<p:sld xmlns:a="http://schemas.openxmlformats.org/drawingml/2006/main" xmlns:r="http://schemas.openxmlformats.org/officeDocument/2006/relationships" xmlns:p="http://schemas.openxmlformats.org/presentationml/2006/main">
+  <p:cSld name="Dataverse Readiness Checkpoint">
+    <p:bg>
+      <p:bgPr>
+        <a:solidFill>
+          <a:srgbClr val="FFFFFF"/>
+        </a:solidFill>
+      </p:bgPr>
+    </p:bg>
+    <p:spTree>
+      <p:nvGrpSpPr>
+        <p:cNvPr id="1" name=""/>
+        <p:cNvGrpSpPr/>
+        <p:nvPr/>
+      </p:nvGrpSpPr>
+      <p:grpSpPr>
+        <a:xfrm>
+          <a:off x="0" y="0"/>
+          <a:ext cx="0" cy="0"/>
+          <a:chOff x="0" y="0"/>
+          <a:chExt cx="0" cy="0"/>
+        </a:xfrm>
+      </p:grpSpPr>
+      <p:sp>
+        <p:nvSpPr>
+          <p:cNvPr id="2" name="Shape 0"/>
+          <p:cNvSpPr/>
+          <p:nvPr/>
+        </p:nvSpPr>
+        <p:spPr>
+          <a:xfrm>
+            <a:off x="0" y="0"/>
+            <a:ext cx="9144000" cy="640080"/>
+          </a:xfrm>
+          <a:prstGeom prst="rect">
+            <a:avLst/>
+          </a:prstGeom>
+          <a:solidFill>
+            <a:srgbClr val="0078D4"/>
+          </a:solidFill>
+          <a:ln w="12700">
+            <a:solidFill>
+              <a:srgbClr val="0078D4"/>
+            </a:solidFill>
+            <a:prstDash val="solid"/>
+          </a:ln>
+        </p:spPr>
+      </p:sp>
+      <p:sp>
+        <p:nvSpPr>
+          <p:cNvPr id="3" name="Text 1"/>
+          <p:cNvSpPr/>
+          <p:nvPr/>
+        </p:nvSpPr>
+        <p:spPr>
+          <a:xfrm>
+            <a:off x="365760" y="0"/>
+            <a:ext cx="8412480" cy="640080"/>
+          </a:xfrm>
+          <a:prstGeom prst="rect">
+            <a:avLst/>
+          </a:prstGeom>
+          <a:noFill/>
+          <a:ln/>
+        </p:spPr>
+        <p:txBody>
+          <a:bodyPr wrap="square" rtlCol="0" anchor="ctr"/>
+          <a:lstStyle/>
+          <a:p>
+            <a:pPr indent="0" marL="0">
+              <a:buNone/>
+            </a:pPr>
+            <a:r>
+              <a:rPr lang="en-US" sz="900" spc="200" kern="0" dirty="0">
+                <a:solidFill>
+                  <a:srgbClr val="C5D8F0"/>
+                </a:solidFill>
+                <a:latin typeface="Segoe UI" pitchFamily="34" charset="0"/>
+                <a:ea typeface="Segoe UI" pitchFamily="34" charset="-122"/>
+                <a:cs typeface="Segoe UI" pitchFamily="34" charset="-120"/>
+              </a:rPr>
+              <a:t>MODULE 09  ·  MULTIMODAL AND DATA</a:t>
+            </a:r>
+            <a:endParaRPr lang="en-US" sz="900" dirty="0"/>
+          </a:p>
+        </p:txBody>
+      </p:sp>
+      <p:sp>
+        <p:nvSpPr>
+          <p:cNvPr id="4" name="Text 2"/>
+          <p:cNvSpPr/>
+          <p:nvPr/>
+        </p:nvSpPr>
+        <p:spPr>
+          <a:xfrm>
+            <a:off x="365760" y="749808"/>
+            <a:ext cx="8412480" cy="475488"/>
+          </a:xfrm>
+          <a:prstGeom prst="rect">
+            <a:avLst/>
+          </a:prstGeom>
+          <a:noFill/>
+          <a:ln/>
+        </p:spPr>
+        <p:txBody>
+          <a:bodyPr wrap="square" rtlCol="0" anchor="ctr"/>
+          <a:lstStyle/>
+          <a:p>
+            <a:pPr indent="0" marL="0">
+              <a:buNone/>
+            </a:pPr>
+            <a:r>
+              <a:rPr lang="en-US" sz="2800" b="1" dirty="0">
+                <a:solidFill>
+                  <a:srgbClr val="201F1E"/>
+                </a:solidFill>
+                <a:latin typeface="Segoe UI" pitchFamily="34" charset="0"/>
+                <a:ea typeface="Segoe UI" pitchFamily="34" charset="-122"/>
+                <a:cs typeface="Segoe UI" pitchFamily="34" charset="-120"/>
+              </a:rPr>
+              <a:t>Dataverse Readiness Checkpoint</a:t>
+            </a:r>
+            <a:endParaRPr lang="en-US" sz="2800" dirty="0"/>
+          </a:p>
+        </p:txBody>
+      </p:sp>
+      <p:sp>
+        <p:nvSpPr>
+          <p:cNvPr id="5" name="Text 3"/>
+          <p:cNvSpPr/>
+          <p:nvPr/>
+        </p:nvSpPr>
+        <p:spPr>
+          <a:xfrm>
+            <a:off x="365760" y="1280160"/>
+            <a:ext cx="8229600" cy="320040"/>
+          </a:xfrm>
+          <a:prstGeom prst="rect">
+            <a:avLst/>
+          </a:prstGeom>
+          <a:noFill/>
+          <a:ln/>
+        </p:spPr>
+        <p:txBody>
+          <a:bodyPr wrap="square" rtlCol="0" anchor="ctr"/>
+          <a:lstStyle/>
+          <a:p>
+            <a:pPr indent="0" marL="0">
+              <a:buNone/>
+            </a:pPr>
+            <a:r>
+              <a:rPr lang="en-US" sz="1200" dirty="0">
+                <a:solidFill>
+                  <a:srgbClr val="605E5C"/>
+                </a:solidFill>
+                <a:latin typeface="Segoe UI" pitchFamily="34" charset="0"/>
+                <a:ea typeface="Segoe UI" pitchFamily="34" charset="-122"/>
+                <a:cs typeface="Segoe UI" pitchFamily="34" charset="-120"/>
+              </a:rPr>
+              <a:t>Before grounding the agent in Dataverse, verify the Hiring Hub tables are visible and populated in the maker portal.</a:t>
+            </a:r>
+            <a:endParaRPr lang="en-US" sz="1200" dirty="0"/>
+          </a:p>
+        </p:txBody>
+      </p:sp>
+      <p:sp>
+        <p:nvSpPr>
+          <p:cNvPr id="6" name="Shape 4"/>
+          <p:cNvSpPr/>
+          <p:nvPr/>
+        </p:nvSpPr>
+        <p:spPr>
+          <a:xfrm>
+            <a:off x="274320" y="1737360"/>
+            <a:ext cx="4069080" cy="2651760"/>
+          </a:xfrm>
+          <a:prstGeom prst="rect">
+            <a:avLst/>
+          </a:prstGeom>
+          <a:solidFill>
+            <a:srgbClr val="F3F2F1"/>
+          </a:solidFill>
+          <a:ln w="12700">
+            <a:solidFill>
+              <a:srgbClr val="E1DFDD"/>
+            </a:solidFill>
+            <a:prstDash val="solid"/>
+          </a:ln>
+          <a:effectLst>
+            <a:outerShdw sx="100000" sy="100000" kx="0" ky="0" algn="bl" rotWithShape="0" blurRad="101600" dist="25400" dir="8100000">
+              <a:srgbClr val="000000">
+                <a:alpha val="10000"/>
+              </a:srgbClr>
+            </a:outerShdw>
+          </a:effectLst>
+        </p:spPr>
+      </p:sp>
+      <p:sp>
+        <p:nvSpPr>
+          <p:cNvPr id="7" name="Shape 5"/>
+          <p:cNvSpPr/>
+          <p:nvPr/>
+        </p:nvSpPr>
+        <p:spPr>
+          <a:xfrm>
+            <a:off x="274320" y="1737360"/>
+            <a:ext cx="4069080" cy="365760"/>
+          </a:xfrm>
+          <a:prstGeom prst="rect">
+            <a:avLst/>
+          </a:prstGeom>
+          <a:solidFill>
+            <a:srgbClr val="605E5C"/>
+          </a:solidFill>
+          <a:ln w="12700">
+            <a:solidFill>
+              <a:srgbClr val="605E5C"/>
+            </a:solidFill>
+            <a:prstDash val="solid"/>
+          </a:ln>
+        </p:spPr>
+      </p:sp>
+      <p:sp>
+        <p:nvSpPr>
+          <p:cNvPr id="8" name="Text 6"/>
+          <p:cNvSpPr/>
+          <p:nvPr/>
+        </p:nvSpPr>
+        <p:spPr>
+          <a:xfrm>
+            <a:off x="384048" y="1737360"/>
+            <a:ext cx="3840480" cy="365760"/>
+          </a:xfrm>
+          <a:prstGeom prst="rect">
+            <a:avLst/>
+          </a:prstGeom>
+          <a:noFill/>
+          <a:ln/>
+        </p:spPr>
+        <p:txBody>
+          <a:bodyPr wrap="square" rtlCol="0" anchor="ctr"/>
+          <a:lstStyle/>
+          <a:p>
+            <a:pPr indent="0" marL="0">
+              <a:buNone/>
+            </a:pPr>
+            <a:r>
+              <a:rPr lang="en-US" sz="1100" b="1" dirty="0">
+                <a:solidFill>
+                  <a:srgbClr val="FFFFFF"/>
+                </a:solidFill>
+                <a:latin typeface="Segoe UI" pitchFamily="34" charset="0"/>
+                <a:ea typeface="Segoe UI" pitchFamily="34" charset="-122"/>
+                <a:cs typeface="Segoe UI" pitchFamily="34" charset="-120"/>
+              </a:rPr>
+              <a:t>Required Tables</a:t>
+            </a:r>
+            <a:endParaRPr lang="en-US" sz="1100" dirty="0"/>
+          </a:p>
+        </p:txBody>
+      </p:sp>
+      <p:sp>
+        <p:nvSpPr>
+          <p:cNvPr id="9" name="Shape 7"/>
+          <p:cNvSpPr/>
+          <p:nvPr/>
+        </p:nvSpPr>
+        <p:spPr>
+          <a:xfrm>
+            <a:off x="384048" y="2249424"/>
+            <a:ext cx="1051560" cy="237744"/>
+          </a:xfrm>
+          <a:prstGeom prst="rect">
+            <a:avLst/>
+          </a:prstGeom>
+          <a:solidFill>
+            <a:srgbClr val="D83B01"/>
+          </a:solidFill>
+          <a:ln w="12700">
+            <a:solidFill>
+              <a:srgbClr val="D83B01"/>
+            </a:solidFill>
+            <a:prstDash val="solid"/>
+          </a:ln>
+        </p:spPr>
+      </p:sp>
+      <p:sp>
+        <p:nvSpPr>
+          <p:cNvPr id="10" name="Text 8"/>
+          <p:cNvSpPr/>
+          <p:nvPr/>
+        </p:nvSpPr>
+        <p:spPr>
+          <a:xfrm>
+            <a:off x="384048" y="2249424"/>
+            <a:ext cx="1051560" cy="237744"/>
+          </a:xfrm>
+          <a:prstGeom prst="rect">
+            <a:avLst/>
+          </a:prstGeom>
+          <a:noFill/>
+          <a:ln/>
+        </p:spPr>
+        <p:txBody>
+          <a:bodyPr wrap="square" lIns="0" tIns="0" rIns="0" bIns="0" rtlCol="0" anchor="ctr"/>
+          <a:lstStyle/>
+          <a:p>
+            <a:pPr algn="ctr" indent="0" marL="0">
+              <a:buNone/>
+            </a:pPr>
+            <a:r>
+              <a:rPr lang="en-US" sz="850" b="1" dirty="0">
+                <a:solidFill>
+                  <a:srgbClr val="FFFFFF"/>
+                </a:solidFill>
+                <a:latin typeface="Segoe UI" pitchFamily="34" charset="0"/>
+                <a:ea typeface="Segoe UI" pitchFamily="34" charset="-122"/>
+                <a:cs typeface="Segoe UI" pitchFamily="34" charset="-120"/>
+              </a:rPr>
+              <a:t>Public websites</a:t>
+            </a:r>
+            <a:endParaRPr lang="en-US" sz="850" dirty="0"/>
+          </a:p>
+        </p:txBody>
+      </p:sp>
+      <p:sp>
+        <p:nvSpPr>
+          <p:cNvPr id="11" name="Text 9"/>
+          <p:cNvSpPr/>
+          <p:nvPr/>
+        </p:nvSpPr>
+        <p:spPr>
+          <a:xfrm>
+            <a:off x="1536192" y="2212848"/>
+            <a:ext cx="2688336" cy="347472"/>
+          </a:xfrm>
+          <a:prstGeom prst="rect">
+            <a:avLst/>
+          </a:prstGeom>
+          <a:noFill/>
+          <a:ln/>
+        </p:spPr>
+        <p:txBody>
+          <a:bodyPr wrap="square" lIns="0" tIns="0" rIns="0" bIns="0" rtlCol="0" anchor="ctr"/>
+          <a:lstStyle/>
+          <a:p>
+            <a:pPr indent="0" marL="0">
+              <a:buNone/>
+            </a:pPr>
+            <a:r>
+              <a:rPr lang="en-US" sz="950" dirty="0">
+                <a:solidFill>
+                  <a:srgbClr val="201F1E"/>
+                </a:solidFill>
+                <a:latin typeface="Segoe UI" pitchFamily="34" charset="0"/>
+                <a:ea typeface="Segoe UI" pitchFamily="34" charset="-122"/>
+                <a:cs typeface="Segoe UI" pitchFamily="34" charset="-120"/>
+              </a:rPr>
+              <a:t>Broad breadth — not governed, not filtered, not role-aware</a:t>
+            </a:r>
+            <a:endParaRPr lang="en-US" sz="950" dirty="0"/>
+          </a:p>
+        </p:txBody>
+      </p:sp>
+      <p:sp>
+        <p:nvSpPr>
+          <p:cNvPr id="12" name="Shape 10"/>
+          <p:cNvSpPr/>
+          <p:nvPr/>
+        </p:nvSpPr>
+        <p:spPr>
+          <a:xfrm>
+            <a:off x="384048" y="2871216"/>
+            <a:ext cx="1051560" cy="237744"/>
+          </a:xfrm>
+          <a:prstGeom prst="rect">
+            <a:avLst/>
+          </a:prstGeom>
+          <a:solidFill>
+            <a:srgbClr val="00B294"/>
+          </a:solidFill>
+          <a:ln w="12700">
+            <a:solidFill>
+              <a:srgbClr val="00B294"/>
+            </a:solidFill>
+            <a:prstDash val="solid"/>
+          </a:ln>
+        </p:spPr>
+      </p:sp>
+      <p:sp>
+        <p:nvSpPr>
+          <p:cNvPr id="13" name="Text 11"/>
+          <p:cNvSpPr/>
+          <p:nvPr/>
+        </p:nvSpPr>
+        <p:spPr>
+          <a:xfrm>
+            <a:off x="384048" y="2871216"/>
+            <a:ext cx="1051560" cy="237744"/>
+          </a:xfrm>
+          <a:prstGeom prst="rect">
+            <a:avLst/>
+          </a:prstGeom>
+          <a:noFill/>
+          <a:ln/>
+        </p:spPr>
+        <p:txBody>
+          <a:bodyPr wrap="square" lIns="0" tIns="0" rIns="0" bIns="0" rtlCol="0" anchor="ctr"/>
+          <a:lstStyle/>
+          <a:p>
+            <a:pPr algn="ctr" indent="0" marL="0">
+              <a:buNone/>
+            </a:pPr>
+            <a:r>
+              <a:rPr lang="en-US" sz="850" b="1" dirty="0">
+                <a:solidFill>
+                  <a:srgbClr val="FFFFFF"/>
+                </a:solidFill>
+                <a:latin typeface="Segoe UI" pitchFamily="34" charset="0"/>
+                <a:ea typeface="Segoe UI" pitchFamily="34" charset="-122"/>
+                <a:cs typeface="Segoe UI" pitchFamily="34" charset="-120"/>
+              </a:rPr>
+              <a:t>SharePoint</a:t>
+            </a:r>
+            <a:endParaRPr lang="en-US" sz="850" dirty="0"/>
+          </a:p>
+        </p:txBody>
+      </p:sp>
+      <p:sp>
+        <p:nvSpPr>
+          <p:cNvPr id="14" name="Text 12"/>
+          <p:cNvSpPr/>
+          <p:nvPr/>
+        </p:nvSpPr>
+        <p:spPr>
+          <a:xfrm>
+            <a:off x="1536192" y="2834640"/>
+            <a:ext cx="2688336" cy="347472"/>
+          </a:xfrm>
+          <a:prstGeom prst="rect">
+            <a:avLst/>
+          </a:prstGeom>
+          <a:noFill/>
+          <a:ln/>
+        </p:spPr>
+        <p:txBody>
+          <a:bodyPr wrap="square" lIns="0" tIns="0" rIns="0" bIns="0" rtlCol="0" anchor="ctr"/>
+          <a:lstStyle/>
+          <a:p>
+            <a:pPr indent="0" marL="0">
+              <a:buNone/>
+            </a:pPr>
+            <a:r>
+              <a:rPr lang="en-US" sz="950" dirty="0">
+                <a:solidFill>
+                  <a:srgbClr val="201F1E"/>
+                </a:solidFill>
+                <a:latin typeface="Segoe UI" pitchFamily="34" charset="0"/>
+                <a:ea typeface="Segoe UI" pitchFamily="34" charset="-122"/>
+                <a:cs typeface="Segoe UI" pitchFamily="34" charset="-120"/>
+              </a:rPr>
+              <a:t>Enterprise content and lists — scoped to site, role-limited</a:t>
+            </a:r>
+            <a:endParaRPr lang="en-US" sz="950" dirty="0"/>
+          </a:p>
+        </p:txBody>
+      </p:sp>
+      <p:sp>
+        <p:nvSpPr>
+          <p:cNvPr id="15" name="Shape 13"/>
+          <p:cNvSpPr/>
+          <p:nvPr/>
+        </p:nvSpPr>
+        <p:spPr>
+          <a:xfrm>
+            <a:off x="384048" y="3493008"/>
+            <a:ext cx="1051560" cy="237744"/>
+          </a:xfrm>
+          <a:prstGeom prst="rect">
+            <a:avLst/>
+          </a:prstGeom>
+          <a:solidFill>
+            <a:srgbClr val="5C2D91"/>
+          </a:solidFill>
+          <a:ln w="12700">
+            <a:solidFill>
+              <a:srgbClr val="5C2D91"/>
+            </a:solidFill>
+            <a:prstDash val="solid"/>
+          </a:ln>
+        </p:spPr>
+      </p:sp>
+      <p:sp>
+        <p:nvSpPr>
+          <p:cNvPr id="16" name="Text 14"/>
+          <p:cNvSpPr/>
+          <p:nvPr/>
+        </p:nvSpPr>
+        <p:spPr>
+          <a:xfrm>
+            <a:off x="384048" y="3493008"/>
+            <a:ext cx="1051560" cy="237744"/>
+          </a:xfrm>
+          <a:prstGeom prst="rect">
+            <a:avLst/>
+          </a:prstGeom>
+          <a:noFill/>
+          <a:ln/>
+        </p:spPr>
+        <p:txBody>
+          <a:bodyPr wrap="square" lIns="0" tIns="0" rIns="0" bIns="0" rtlCol="0" anchor="ctr"/>
+          <a:lstStyle/>
+          <a:p>
+            <a:pPr algn="ctr" indent="0" marL="0">
+              <a:buNone/>
+            </a:pPr>
+            <a:r>
+              <a:rPr lang="en-US" sz="850" b="1" dirty="0">
+                <a:solidFill>
+                  <a:srgbClr val="FFFFFF"/>
+                </a:solidFill>
+                <a:latin typeface="Segoe UI" pitchFamily="34" charset="0"/>
+                <a:ea typeface="Segoe UI" pitchFamily="34" charset="-122"/>
+                <a:cs typeface="Segoe UI" pitchFamily="34" charset="-120"/>
+              </a:rPr>
+              <a:t>Uploaded files</a:t>
+            </a:r>
+            <a:endParaRPr lang="en-US" sz="850" dirty="0"/>
+          </a:p>
+        </p:txBody>
+      </p:sp>
+      <p:sp>
+        <p:nvSpPr>
+          <p:cNvPr id="17" name="Text 15"/>
+          <p:cNvSpPr/>
+          <p:nvPr/>
+        </p:nvSpPr>
+        <p:spPr>
+          <a:xfrm>
+            <a:off x="1536192" y="3456432"/>
+            <a:ext cx="2688336" cy="347472"/>
+          </a:xfrm>
+          <a:prstGeom prst="rect">
+            <a:avLst/>
+          </a:prstGeom>
+          <a:noFill/>
+          <a:ln/>
+        </p:spPr>
+        <p:txBody>
+          <a:bodyPr wrap="square" lIns="0" tIns="0" rIns="0" bIns="0" rtlCol="0" anchor="ctr"/>
+          <a:lstStyle/>
+          <a:p>
+            <a:pPr indent="0" marL="0">
+              <a:buNone/>
+            </a:pPr>
+            <a:r>
+              <a:rPr lang="en-US" sz="950" dirty="0">
+                <a:solidFill>
+                  <a:srgbClr val="201F1E"/>
+                </a:solidFill>
+                <a:latin typeface="Segoe UI" pitchFamily="34" charset="0"/>
+                <a:ea typeface="Segoe UI" pitchFamily="34" charset="-122"/>
+                <a:cs typeface="Segoe UI" pitchFamily="34" charset="-120"/>
+              </a:rPr>
+              <a:t>Narrow references — good for static, well-curated content</a:t>
+            </a:r>
+            <a:endParaRPr lang="en-US" sz="950" dirty="0"/>
+          </a:p>
+        </p:txBody>
+      </p:sp>
+      <p:sp>
+        <p:nvSpPr>
+          <p:cNvPr id="18" name="Shape 16"/>
+          <p:cNvSpPr/>
+          <p:nvPr/>
+        </p:nvSpPr>
+        <p:spPr>
+          <a:xfrm>
+            <a:off x="4617720" y="1737360"/>
+            <a:ext cx="4251960" cy="2651760"/>
+          </a:xfrm>
+          <a:prstGeom prst="rect">
+            <a:avLst/>
+          </a:prstGeom>
+          <a:solidFill>
+            <a:srgbClr val="F3F2F1"/>
+          </a:solidFill>
+          <a:ln w="12700">
+            <a:solidFill>
+              <a:srgbClr val="E1DFDD"/>
+            </a:solidFill>
+            <a:prstDash val="solid"/>
+          </a:ln>
+          <a:effectLst>
+            <a:outerShdw sx="100000" sy="100000" kx="0" ky="0" algn="bl" rotWithShape="0" blurRad="101600" dist="25400" dir="8100000">
+              <a:srgbClr val="000000">
+                <a:alpha val="10000"/>
+              </a:srgbClr>
+            </a:outerShdw>
+          </a:effectLst>
+        </p:spPr>
+      </p:sp>
+      <p:sp>
+        <p:nvSpPr>
+          <p:cNvPr id="19" name="Shape 17"/>
+          <p:cNvSpPr/>
+          <p:nvPr/>
+        </p:nvSpPr>
+        <p:spPr>
+          <a:xfrm>
+            <a:off x="4617720" y="1737360"/>
+            <a:ext cx="4251960" cy="365760"/>
+          </a:xfrm>
+          <a:prstGeom prst="rect">
+            <a:avLst/>
+          </a:prstGeom>
+          <a:solidFill>
+            <a:srgbClr val="D47900"/>
+          </a:solidFill>
+          <a:ln w="12700">
+            <a:solidFill>
+              <a:srgbClr val="D47900"/>
+            </a:solidFill>
+            <a:prstDash val="solid"/>
+          </a:ln>
+        </p:spPr>
+      </p:sp>
+      <p:sp>
+        <p:nvSpPr>
+          <p:cNvPr id="20" name="Text 18"/>
+          <p:cNvSpPr/>
+          <p:nvPr/>
+        </p:nvSpPr>
+        <p:spPr>
+          <a:xfrm>
+            <a:off x="4727448" y="1737360"/>
+            <a:ext cx="4023360" cy="365760"/>
+          </a:xfrm>
+          <a:prstGeom prst="rect">
+            <a:avLst/>
+          </a:prstGeom>
+          <a:noFill/>
+          <a:ln/>
+        </p:spPr>
+        <p:txBody>
+          <a:bodyPr wrap="square" rtlCol="0" anchor="ctr"/>
+          <a:lstStyle/>
+          <a:p>
+            <a:pPr indent="0" marL="0">
+              <a:buNone/>
+            </a:pPr>
+            <a:r>
+              <a:rPr lang="en-US" sz="1100" b="1" dirty="0">
+                <a:solidFill>
+                  <a:srgbClr val="FFFFFF"/>
+                </a:solidFill>
+                <a:latin typeface="Segoe UI" pitchFamily="34" charset="0"/>
+                <a:ea typeface="Segoe UI" pitchFamily="34" charset="-122"/>
+                <a:cs typeface="Segoe UI" pitchFamily="34" charset="-120"/>
+              </a:rPr>
+              <a:t>Dataverse: What Changes</a:t>
+            </a:r>
+            <a:endParaRPr lang="en-US" sz="1100" dirty="0"/>
+          </a:p>
+        </p:txBody>
+      </p:sp>
+      <p:sp>
+        <p:nvSpPr>
+          <p:cNvPr id="21" name="Shape 19"/>
+          <p:cNvSpPr/>
+          <p:nvPr/>
+        </p:nvSpPr>
+        <p:spPr>
+          <a:xfrm>
+            <a:off x="4727448" y="2249424"/>
+            <a:ext cx="128016" cy="237744"/>
+          </a:xfrm>
+          <a:prstGeom prst="rect">
+            <a:avLst/>
+          </a:prstGeom>
+          <a:solidFill>
+            <a:srgbClr val="D47900"/>
+          </a:solidFill>
+          <a:ln w="12700">
+            <a:solidFill>
+              <a:srgbClr val="D47900"/>
+            </a:solidFill>
+            <a:prstDash val="solid"/>
+          </a:ln>
+        </p:spPr>
+      </p:sp>
+      <p:sp>
+        <p:nvSpPr>
+          <p:cNvPr id="22" name="Text 20"/>
+          <p:cNvSpPr/>
+          <p:nvPr/>
+        </p:nvSpPr>
+        <p:spPr>
+          <a:xfrm>
+            <a:off x="4919472" y="2249424"/>
+            <a:ext cx="1371600" cy="237744"/>
+          </a:xfrm>
+          <a:prstGeom prst="rect">
+            <a:avLst/>
+          </a:prstGeom>
+          <a:noFill/>
+          <a:ln/>
+        </p:spPr>
+        <p:txBody>
+          <a:bodyPr wrap="square" lIns="0" tIns="0" rIns="0" bIns="0" rtlCol="0" anchor="ctr"/>
+          <a:lstStyle/>
+          <a:p>
+            <a:pPr indent="0" marL="0">
+              <a:buNone/>
+            </a:pPr>
+            <a:r>
+              <a:rPr lang="en-US" sz="950" b="1" dirty="0">
+                <a:solidFill>
+                  <a:srgbClr val="D47900"/>
+                </a:solidFill>
+                <a:latin typeface="Segoe UI" pitchFamily="34" charset="0"/>
+                <a:ea typeface="Segoe UI" pitchFamily="34" charset="-122"/>
+                <a:cs typeface="Segoe UI" pitchFamily="34" charset="-120"/>
+              </a:rPr>
+              <a:t>Structured records</a:t>
+            </a:r>
+            <a:endParaRPr lang="en-US" sz="950" dirty="0"/>
+          </a:p>
+        </p:txBody>
+      </p:sp>
+      <p:sp>
+        <p:nvSpPr>
+          <p:cNvPr id="23" name="Text 21"/>
+          <p:cNvSpPr/>
+          <p:nvPr/>
+        </p:nvSpPr>
+        <p:spPr>
+          <a:xfrm>
+            <a:off x="4919472" y="2487168"/>
+            <a:ext cx="3822192" cy="201168"/>
+          </a:xfrm>
+          <a:prstGeom prst="rect">
+            <a:avLst/>
+          </a:prstGeom>
+          <a:noFill/>
+          <a:ln/>
+        </p:spPr>
+        <p:txBody>
+          <a:bodyPr wrap="square" lIns="0" tIns="0" rIns="0" bIns="0" rtlCol="0" anchor="ctr"/>
+          <a:lstStyle/>
+          <a:p>
+            <a:pPr indent="0" marL="0">
+              <a:buNone/>
+            </a:pPr>
+            <a:r>
+              <a:rPr lang="en-US" sz="900" dirty="0">
+                <a:solidFill>
+                  <a:srgbClr val="201F1E"/>
+                </a:solidFill>
+                <a:latin typeface="Segoe UI" pitchFamily="34" charset="0"/>
+                <a:ea typeface="Segoe UI" pitchFamily="34" charset="-122"/>
+                <a:cs typeface="Segoe UI" pitchFamily="34" charset="-120"/>
+              </a:rPr>
+              <a:t>Typed columns, relationships, and indexes — not flat content</a:t>
+            </a:r>
+            <a:endParaRPr lang="en-US" sz="900" dirty="0"/>
+          </a:p>
+        </p:txBody>
+      </p:sp>
+      <p:sp>
+        <p:nvSpPr>
+          <p:cNvPr id="24" name="Shape 22"/>
+          <p:cNvSpPr/>
+          <p:nvPr/>
+        </p:nvSpPr>
+        <p:spPr>
+          <a:xfrm>
+            <a:off x="4727448" y="2779776"/>
+            <a:ext cx="128016" cy="237744"/>
+          </a:xfrm>
+          <a:prstGeom prst="rect">
+            <a:avLst/>
+          </a:prstGeom>
+          <a:solidFill>
+            <a:srgbClr val="D47900"/>
+          </a:solidFill>
+          <a:ln w="12700">
+            <a:solidFill>
+              <a:srgbClr val="D47900"/>
+            </a:solidFill>
+            <a:prstDash val="solid"/>
+          </a:ln>
+        </p:spPr>
+      </p:sp>
+      <p:sp>
+        <p:nvSpPr>
+          <p:cNvPr id="25" name="Text 23"/>
+          <p:cNvSpPr/>
+          <p:nvPr/>
+        </p:nvSpPr>
+        <p:spPr>
+          <a:xfrm>
+            <a:off x="4919472" y="2779776"/>
+            <a:ext cx="1371600" cy="237744"/>
+          </a:xfrm>
+          <a:prstGeom prst="rect">
+            <a:avLst/>
+          </a:prstGeom>
+          <a:noFill/>
+          <a:ln/>
+        </p:spPr>
+        <p:txBody>
+          <a:bodyPr wrap="square" lIns="0" tIns="0" rIns="0" bIns="0" rtlCol="0" anchor="ctr"/>
+          <a:lstStyle/>
+          <a:p>
+            <a:pPr indent="0" marL="0">
+              <a:buNone/>
+            </a:pPr>
+            <a:r>
+              <a:rPr lang="en-US" sz="950" b="1" dirty="0">
+                <a:solidFill>
+                  <a:srgbClr val="D47900"/>
+                </a:solidFill>
+                <a:latin typeface="Segoe UI" pitchFamily="34" charset="0"/>
+                <a:ea typeface="Segoe UI" pitchFamily="34" charset="-122"/>
+                <a:cs typeface="Segoe UI" pitchFamily="34" charset="-120"/>
+              </a:rPr>
+              <a:t>Role-based access</a:t>
+            </a:r>
+            <a:endParaRPr lang="en-US" sz="950" dirty="0"/>
+          </a:p>
+        </p:txBody>
+      </p:sp>
+      <p:sp>
+        <p:nvSpPr>
+          <p:cNvPr id="26" name="Text 24"/>
+          <p:cNvSpPr/>
+          <p:nvPr/>
+        </p:nvSpPr>
+        <p:spPr>
+          <a:xfrm>
+            <a:off x="4919472" y="3017520"/>
+            <a:ext cx="3822192" cy="201168"/>
+          </a:xfrm>
+          <a:prstGeom prst="rect">
+            <a:avLst/>
+          </a:prstGeom>
+          <a:noFill/>
+          <a:ln/>
+        </p:spPr>
+        <p:txBody>
+          <a:bodyPr wrap="square" lIns="0" tIns="0" rIns="0" bIns="0" rtlCol="0" anchor="ctr"/>
+          <a:lstStyle/>
+          <a:p>
+            <a:pPr indent="0" marL="0">
+              <a:buNone/>
+            </a:pPr>
+            <a:r>
+              <a:rPr lang="en-US" sz="900" dirty="0">
+                <a:solidFill>
+                  <a:srgbClr val="201F1E"/>
+                </a:solidFill>
+                <a:latin typeface="Segoe UI" pitchFamily="34" charset="0"/>
+                <a:ea typeface="Segoe UI" pitchFamily="34" charset="-122"/>
+                <a:cs typeface="Segoe UI" pitchFamily="34" charset="-120"/>
+              </a:rPr>
+              <a:t>Dataverse security roles scope what the agent can read at runtime</a:t>
+            </a:r>
+            <a:endParaRPr lang="en-US" sz="900" dirty="0"/>
+          </a:p>
+        </p:txBody>
+      </p:sp>
+      <p:sp>
+        <p:nvSpPr>
+          <p:cNvPr id="27" name="Shape 25"/>
+          <p:cNvSpPr/>
+          <p:nvPr/>
+        </p:nvSpPr>
+        <p:spPr>
+          <a:xfrm>
+            <a:off x="4727448" y="3310128"/>
+            <a:ext cx="128016" cy="237744"/>
+          </a:xfrm>
+          <a:prstGeom prst="rect">
+            <a:avLst/>
+          </a:prstGeom>
+          <a:solidFill>
+            <a:srgbClr val="D47900"/>
+          </a:solidFill>
+          <a:ln w="12700">
+            <a:solidFill>
+              <a:srgbClr val="D47900"/>
+            </a:solidFill>
+            <a:prstDash val="solid"/>
+          </a:ln>
+        </p:spPr>
+      </p:sp>
+      <p:sp>
+        <p:nvSpPr>
+          <p:cNvPr id="28" name="Text 26"/>
+          <p:cNvSpPr/>
+          <p:nvPr/>
+        </p:nvSpPr>
+        <p:spPr>
+          <a:xfrm>
+            <a:off x="4919472" y="3310128"/>
+            <a:ext cx="1371600" cy="237744"/>
+          </a:xfrm>
+          <a:prstGeom prst="rect">
+            <a:avLst/>
+          </a:prstGeom>
+          <a:noFill/>
+          <a:ln/>
+        </p:spPr>
+        <p:txBody>
+          <a:bodyPr wrap="square" lIns="0" tIns="0" rIns="0" bIns="0" rtlCol="0" anchor="ctr"/>
+          <a:lstStyle/>
+          <a:p>
+            <a:pPr indent="0" marL="0">
+              <a:buNone/>
+            </a:pPr>
+            <a:r>
+              <a:rPr lang="en-US" sz="950" b="1" dirty="0">
+                <a:solidFill>
+                  <a:srgbClr val="D47900"/>
+                </a:solidFill>
+                <a:latin typeface="Segoe UI" pitchFamily="34" charset="0"/>
+                <a:ea typeface="Segoe UI" pitchFamily="34" charset="-122"/>
+                <a:cs typeface="Segoe UI" pitchFamily="34" charset="-120"/>
+              </a:rPr>
+              <a:t>Column selection</a:t>
+            </a:r>
+            <a:endParaRPr lang="en-US" sz="950" dirty="0"/>
+          </a:p>
+        </p:txBody>
+      </p:sp>
+      <p:sp>
+        <p:nvSpPr>
+          <p:cNvPr id="29" name="Text 27"/>
+          <p:cNvSpPr/>
+          <p:nvPr/>
+        </p:nvSpPr>
+        <p:spPr>
+          <a:xfrm>
+            <a:off x="4919472" y="3547872"/>
+            <a:ext cx="3822192" cy="201168"/>
+          </a:xfrm>
+          <a:prstGeom prst="rect">
+            <a:avLst/>
+          </a:prstGeom>
+          <a:noFill/>
+          <a:ln/>
+        </p:spPr>
+        <p:txBody>
+          <a:bodyPr wrap="square" lIns="0" tIns="0" rIns="0" bIns="0" rtlCol="0" anchor="ctr"/>
+          <a:lstStyle/>
+          <a:p>
+            <a:pPr indent="0" marL="0">
+              <a:buNone/>
+            </a:pPr>
+            <a:r>
+              <a:rPr lang="en-US" sz="900" dirty="0">
+                <a:solidFill>
+                  <a:srgbClr val="201F1E"/>
+                </a:solidFill>
+                <a:latin typeface="Segoe UI" pitchFamily="34" charset="0"/>
+                <a:ea typeface="Segoe UI" pitchFamily="34" charset="-122"/>
+                <a:cs typeface="Segoe UI" pitchFamily="34" charset="-120"/>
+              </a:rPr>
+              <a:t>Pick only the columns the prompt needs — reduces noise in context</a:t>
+            </a:r>
+            <a:endParaRPr lang="en-US" sz="900" dirty="0"/>
+          </a:p>
+        </p:txBody>
+      </p:sp>
+      <p:sp>
+        <p:nvSpPr>
+          <p:cNvPr id="30" name="Shape 28"/>
+          <p:cNvSpPr/>
+          <p:nvPr/>
+        </p:nvSpPr>
+        <p:spPr>
+          <a:xfrm>
+            <a:off x="4727448" y="3840480"/>
+            <a:ext cx="128016" cy="237744"/>
+          </a:xfrm>
+          <a:prstGeom prst="rect">
+            <a:avLst/>
+          </a:prstGeom>
+          <a:solidFill>
+            <a:srgbClr val="D47900"/>
+          </a:solidFill>
+          <a:ln w="12700">
+            <a:solidFill>
+              <a:srgbClr val="D47900"/>
+            </a:solidFill>
+            <a:prstDash val="solid"/>
+          </a:ln>
+        </p:spPr>
+      </p:sp>
+      <p:sp>
+        <p:nvSpPr>
+          <p:cNvPr id="31" name="Text 29"/>
+          <p:cNvSpPr/>
+          <p:nvPr/>
+        </p:nvSpPr>
+        <p:spPr>
+          <a:xfrm>
+            <a:off x="4919472" y="3840480"/>
+            <a:ext cx="1371600" cy="237744"/>
+          </a:xfrm>
+          <a:prstGeom prst="rect">
+            <a:avLst/>
+          </a:prstGeom>
+          <a:noFill/>
+          <a:ln/>
+        </p:spPr>
+        <p:txBody>
+          <a:bodyPr wrap="square" lIns="0" tIns="0" rIns="0" bIns="0" rtlCol="0" anchor="ctr"/>
+          <a:lstStyle/>
+          <a:p>
+            <a:pPr indent="0" marL="0">
+              <a:buNone/>
+            </a:pPr>
+            <a:r>
+              <a:rPr lang="en-US" sz="950" b="1" dirty="0">
+                <a:solidFill>
+                  <a:srgbClr val="D47900"/>
+                </a:solidFill>
+                <a:latin typeface="Segoe UI" pitchFamily="34" charset="0"/>
+                <a:ea typeface="Segoe UI" pitchFamily="34" charset="-122"/>
+                <a:cs typeface="Segoe UI" pitchFamily="34" charset="-120"/>
+              </a:rPr>
+              <a:t>Filtered grounding</a:t>
+            </a:r>
+            <a:endParaRPr lang="en-US" sz="950" dirty="0"/>
+          </a:p>
+        </p:txBody>
+      </p:sp>
+      <p:sp>
+        <p:nvSpPr>
+          <p:cNvPr id="32" name="Text 30"/>
+          <p:cNvSpPr/>
+          <p:nvPr/>
+        </p:nvSpPr>
+        <p:spPr>
+          <a:xfrm>
+            <a:off x="4919472" y="4078224"/>
+            <a:ext cx="3822192" cy="201168"/>
+          </a:xfrm>
+          <a:prstGeom prst="rect">
+            <a:avLst/>
+          </a:prstGeom>
+          <a:noFill/>
+          <a:ln/>
+        </p:spPr>
+        <p:txBody>
+          <a:bodyPr wrap="square" lIns="0" tIns="0" rIns="0" bIns="0" rtlCol="0" anchor="ctr"/>
+          <a:lstStyle/>
+          <a:p>
+            <a:pPr indent="0" marL="0">
+              <a:buNone/>
+            </a:pPr>
+            <a:r>
+              <a:rPr lang="en-US" sz="900" dirty="0">
+                <a:solidFill>
+                  <a:srgbClr val="201F1E"/>
+                </a:solidFill>
+                <a:latin typeface="Segoe UI" pitchFamily="34" charset="0"/>
+                <a:ea typeface="Segoe UI" pitchFamily="34" charset="-122"/>
+                <a:cs typeface="Segoe UI" pitchFamily="34" charset="-120"/>
+              </a:rPr>
+              <a:t>Status = Open, Department = Engineering — deterministic data scope</a:t>
+            </a:r>
+            <a:endParaRPr lang="en-US" sz="900" dirty="0"/>
+          </a:p>
+        </p:txBody>
+      </p:sp>
+      <p:sp>
+        <p:nvSpPr>
+          <p:cNvPr id="33" name="Shape 31"/>
+          <p:cNvSpPr/>
+          <p:nvPr/>
+        </p:nvSpPr>
+        <p:spPr>
+          <a:xfrm>
+            <a:off x="274320" y="4526280"/>
+            <a:ext cx="8595360" cy="320040"/>
+          </a:xfrm>
+          <a:prstGeom prst="rect">
+            <a:avLst/>
+          </a:prstGeom>
+          <a:solidFill>
+            <a:srgbClr val="243A5E"/>
+          </a:solidFill>
+          <a:ln w="12700">
+            <a:solidFill>
+              <a:srgbClr val="243A5E"/>
+            </a:solidFill>
+            <a:prstDash val="solid"/>
+          </a:ln>
+        </p:spPr>
+      </p:sp>
+      <p:sp>
+        <p:nvSpPr>
+          <p:cNvPr id="34" name="Shape 32"/>
+          <p:cNvSpPr/>
+          <p:nvPr/>
+        </p:nvSpPr>
+        <p:spPr>
+          <a:xfrm>
+            <a:off x="274320" y="4526280"/>
+            <a:ext cx="54864" cy="320040"/>
+          </a:xfrm>
+          <a:prstGeom prst="rect">
+            <a:avLst/>
+          </a:prstGeom>
+          <a:solidFill>
+            <a:srgbClr val="D47900"/>
+          </a:solidFill>
+          <a:ln w="12700">
+            <a:solidFill>
+              <a:srgbClr val="D47900"/>
+            </a:solidFill>
+            <a:prstDash val="solid"/>
+          </a:ln>
+        </p:spPr>
+      </p:sp>
+      <p:sp>
+        <p:nvSpPr>
+          <p:cNvPr id="35" name="Text 33"/>
+          <p:cNvSpPr/>
+          <p:nvPr/>
+        </p:nvSpPr>
+        <p:spPr>
+          <a:xfrm>
+            <a:off x="438912" y="4526280"/>
+            <a:ext cx="8366760" cy="320040"/>
+          </a:xfrm>
+          <a:prstGeom prst="rect">
+            <a:avLst/>
+          </a:prstGeom>
+          <a:noFill/>
+          <a:ln/>
+        </p:spPr>
+        <p:txBody>
+          <a:bodyPr wrap="square" rtlCol="0" anchor="ctr"/>
+          <a:lstStyle/>
+          <a:p>
+            <a:pPr indent="0" marL="0">
+              <a:buNone/>
+            </a:pPr>
+            <a:r>
+              <a:rPr lang="en-US" sz="1100" b="1" dirty="0">
+                <a:solidFill>
+                  <a:srgbClr val="FFFFFF"/>
+                </a:solidFill>
+                <a:latin typeface="Segoe UI" pitchFamily="34" charset="0"/>
+                <a:ea typeface="Segoe UI" pitchFamily="34" charset="-122"/>
+                <a:cs typeface="Segoe UI" pitchFamily="34" charset="-120"/>
+              </a:rPr>
+              <a:t>Schema quality and access control now matter as much as prompt wording.</a:t>
             </a:r>
             <a:endParaRPr lang="en-US" sz="1100" dirty="0"/>
           </a:p>
